--- a/classes/parte-9-forense-digital-y-respuesta-a-incidentes/204-forense-de-sistemas-de-archivos-ntfs-y-ext4/clase-204-presentacion.pptx
+++ b/classes/parte-9-forense-digital-y-respuesta-a-incidentes/204-forense-de-sistemas-de-archivos-ntfs-y-ext4/clase-204-presentacion.pptx
@@ -17,6 +17,11 @@
     <p:sldId id="265" r:id="rId16"/>
     <p:sldId id="266" r:id="rId17"/>
     <p:sldId id="267" r:id="rId18"/>
+    <p:sldId id="268" r:id="rId19"/>
+    <p:sldId id="269" r:id="rId20"/>
+    <p:sldId id="270" r:id="rId21"/>
+    <p:sldId id="271" r:id="rId22"/>
+    <p:sldId id="272" r:id="rId23"/>
   </p:sldIdLst>
   <p:sldSz cx="9144000" cy="6858000" type="screen4x3"/>
   <p:notesSz cx="6858000" cy="9144000"/>
@@ -3198,7 +3203,7 @@
                   <a:srgbClr val="0B3D2E"/>
                 </a:solidFill>
               </a:rPr>
-              <a:t>⚠️ Errores comunes</a:t>
+              <a:t>🧰 Herramientas y preparación</a:t>
             </a:r>
           </a:p>
         </p:txBody>
@@ -3236,67 +3241,52 @@
                   <a:srgbClr val="22282E"/>
                 </a:solidFill>
               </a:rPr>
-              <a:t>•  fls no muestra offset correcto — Falta -o con el sector de inicio de la partición. Sácalo de mmls.</a:t>
-            </a:r>
-          </a:p>
-          <a:p>
-            <a:pPr>
-              <a:spcAft>
-                <a:spcPts val="600"/>
-              </a:spcAft>
-            </a:pPr>
-            <a:r>
-              <a:rPr sz="1500">
-                <a:solidFill>
-                  <a:srgbClr val="22282E"/>
-                </a:solidFill>
-              </a:rPr>
-              <a:t>•  icat devuelve datos basura — El inodo fue reasignado; los bloques ya se sobrescribieron.</a:t>
-            </a:r>
-          </a:p>
-          <a:p>
-            <a:pPr>
-              <a:spcAft>
-                <a:spcPts val="600"/>
-              </a:spcAft>
-            </a:pPr>
-            <a:r>
-              <a:rPr sz="1500">
-                <a:solidFill>
-                  <a:srgbClr val="22282E"/>
-                </a:solidFill>
-              </a:rPr>
-              <a:t>•  Timestamps "imposibles" (futuro) — Timestomping o reloj alterado. Contrasta con $FN.</a:t>
-            </a:r>
-          </a:p>
-          <a:p>
-            <a:pPr>
-              <a:spcAft>
-                <a:spcPts val="600"/>
-              </a:spcAft>
-            </a:pPr>
-            <a:r>
-              <a:rPr sz="1500">
-                <a:solidFill>
-                  <a:srgbClr val="22282E"/>
-                </a:solidFill>
-              </a:rPr>
-              <a:t>•  extundelete no recupera nada — ext4 limpió los punteros del inodo. Prueba carving (clase 214).</a:t>
-            </a:r>
-          </a:p>
-          <a:p>
-            <a:pPr>
-              <a:spcAft>
-                <a:spcPts val="600"/>
-              </a:spcAft>
-            </a:pPr>
-            <a:r>
-              <a:rPr sz="1500">
-                <a:solidFill>
-                  <a:srgbClr val="22282E"/>
-                </a:solidFill>
-              </a:rPr>
-              <a:t>•  MFTECmd no encuentra $MFT — Debes extraer $MFT con FTK Imager primero.</a:t>
+              <a:t>•  The Sleuth Kit (TSK): fls, istat, icat, mmls, fsstat, mactime.</a:t>
+            </a:r>
+          </a:p>
+          <a:p>
+            <a:pPr>
+              <a:spcAft>
+                <a:spcPts val="600"/>
+              </a:spcAft>
+            </a:pPr>
+            <a:r>
+              <a:rPr sz="1500">
+                <a:solidFill>
+                  <a:srgbClr val="22282E"/>
+                </a:solidFill>
+              </a:rPr>
+              <a:t>•  NTFS específico: analyzeMFT.py, MFTECmd (Eric Zimmerman), UsnJrnl2Csv.</a:t>
+            </a:r>
+          </a:p>
+          <a:p>
+            <a:pPr>
+              <a:spcAft>
+                <a:spcPts val="600"/>
+              </a:spcAft>
+            </a:pPr>
+            <a:r>
+              <a:rPr sz="1500">
+                <a:solidFill>
+                  <a:srgbClr val="22282E"/>
+                </a:solidFill>
+              </a:rPr>
+              <a:t>•  ext4: debugfs, extundelete.</a:t>
+            </a:r>
+          </a:p>
+          <a:p>
+            <a:pPr>
+              <a:spcAft>
+                <a:spcPts val="600"/>
+              </a:spcAft>
+            </a:pPr>
+            <a:r>
+              <a:rPr sz="1500">
+                <a:solidFill>
+                  <a:srgbClr val="22282E"/>
+                </a:solidFill>
+              </a:rPr>
+              <a:t>•  Entorno: monta las imágenes en solo lectura. Trabaja sobre imágenes propias creadas en la clase anterior.</a:t>
             </a:r>
           </a:p>
         </p:txBody>
@@ -3347,7 +3337,7 @@
                   <a:srgbClr val="0B3D2E"/>
                 </a:solidFill>
               </a:rPr>
-              <a:t>❓ Preguntas frecuentes</a:t>
+              <a:t>🧪 Laboratorio guiado</a:t>
             </a:r>
           </a:p>
         </p:txBody>
@@ -3385,97 +3375,97 @@
                   <a:srgbClr val="22282E"/>
                 </a:solidFill>
               </a:rPr>
-              <a:t>•  ❓ ¿Por qué hay dos juegos de timestamps en NTFS?</a:t>
-            </a:r>
-          </a:p>
-          <a:p>
-            <a:pPr>
-              <a:spcAft>
-                <a:spcPts val="600"/>
-              </a:spcAft>
-            </a:pPr>
-            <a:r>
-              <a:rPr sz="1500">
-                <a:solidFill>
-                  <a:srgbClr val="22282E"/>
-                </a:solidFill>
-              </a:rPr>
-              <a:t>•  $STANDARDINFORMATION lo actualizan apps y usuarios; $FILENAME solo el kernel. Compararlos delata manipulación.</a:t>
-            </a:r>
-          </a:p>
-          <a:p>
-            <a:pPr>
-              <a:spcAft>
-                <a:spcPts val="600"/>
-              </a:spcAft>
-            </a:pPr>
-            <a:r>
-              <a:rPr sz="1500">
-                <a:solidFill>
-                  <a:srgbClr val="22282E"/>
-                </a:solidFill>
-              </a:rPr>
-              <a:t>•  ❓ ¿ext4 conserva archivos borrados?</a:t>
-            </a:r>
-          </a:p>
-          <a:p>
-            <a:pPr>
-              <a:spcAft>
-                <a:spcPts val="600"/>
-              </a:spcAft>
-            </a:pPr>
-            <a:r>
-              <a:rPr sz="1500">
-                <a:solidFill>
-                  <a:srgbClr val="22282E"/>
-                </a:solidFill>
-              </a:rPr>
-              <a:t>•  Menos que NTFS: suele limpiar los punteros del inodo. A veces el journal ayuda, y siempre queda el carving.</a:t>
-            </a:r>
-          </a:p>
-          <a:p>
-            <a:pPr>
-              <a:spcAft>
-                <a:spcPts val="600"/>
-              </a:spcAft>
-            </a:pPr>
-            <a:r>
-              <a:rPr sz="1500">
-                <a:solidFill>
-                  <a:srgbClr val="22282E"/>
-                </a:solidFill>
-              </a:rPr>
-              <a:t>•  ❓ ¿Qué es un archivo residente?</a:t>
-            </a:r>
-          </a:p>
-          <a:p>
-            <a:pPr>
-              <a:spcAft>
-                <a:spcPts val="600"/>
-              </a:spcAft>
-            </a:pPr>
-            <a:r>
-              <a:rPr sz="1500">
-                <a:solidFill>
-                  <a:srgbClr val="22282E"/>
-                </a:solidFill>
-              </a:rPr>
-              <a:t>•  Uno tan pequeño que sus datos caben dentro del propio registro de la MFT, sin ocupar clusters aparte.</a:t>
-            </a:r>
-          </a:p>
-          <a:p>
-            <a:pPr>
-              <a:spcAft>
-                <a:spcPts val="600"/>
-              </a:spcAft>
-            </a:pPr>
-            <a:r>
-              <a:rPr sz="1500">
-                <a:solidFill>
-                  <a:srgbClr val="22282E"/>
-                </a:solidFill>
-              </a:rPr>
-              <a:t>•  ❓ ¿El $UsnJrnl está siempre activo?</a:t>
+              <a:t>•  Examina la tabla de particiones:</a:t>
+            </a:r>
+          </a:p>
+          <a:p>
+            <a:pPr>
+              <a:spcAft>
+                <a:spcPts val="600"/>
+              </a:spcAft>
+            </a:pPr>
+            <a:r>
+              <a:rPr sz="1500">
+                <a:solidFill>
+                  <a:srgbClr val="22282E"/>
+                </a:solidFill>
+              </a:rPr>
+              <a:t>•  Muestra estadísticas del sistema de archivos:</a:t>
+            </a:r>
+          </a:p>
+          <a:p>
+            <a:pPr>
+              <a:spcAft>
+                <a:spcPts val="600"/>
+              </a:spcAft>
+            </a:pPr>
+            <a:r>
+              <a:rPr sz="1500">
+                <a:solidFill>
+                  <a:srgbClr val="22282E"/>
+                </a:solidFill>
+              </a:rPr>
+              <a:t>•  Lista archivos incluyendo borrados (marcados con ):</a:t>
+            </a:r>
+          </a:p>
+          <a:p>
+            <a:pPr>
+              <a:spcAft>
+                <a:spcPts val="600"/>
+              </a:spcAft>
+            </a:pPr>
+            <a:r>
+              <a:rPr sz="1500">
+                <a:solidFill>
+                  <a:srgbClr val="22282E"/>
+                </a:solidFill>
+              </a:rPr>
+              <a:t>•  Inspecciona un inodo/registro MFT concreto:</a:t>
+            </a:r>
+          </a:p>
+          <a:p>
+            <a:pPr>
+              <a:spcAft>
+                <a:spcPts val="600"/>
+              </a:spcAft>
+            </a:pPr>
+            <a:r>
+              <a:rPr sz="1500">
+                <a:solidFill>
+                  <a:srgbClr val="22282E"/>
+                </a:solidFill>
+              </a:rPr>
+              <a:t>•  Recupera el contenido de un archivo por su inodo:</a:t>
+            </a:r>
+          </a:p>
+          <a:p>
+            <a:pPr>
+              <a:spcAft>
+                <a:spcPts val="600"/>
+              </a:spcAft>
+            </a:pPr>
+            <a:r>
+              <a:rPr sz="1500">
+                <a:solidFill>
+                  <a:srgbClr val="22282E"/>
+                </a:solidFill>
+              </a:rPr>
+              <a:t>•  Genera una línea de tiempo del sistema de archivos:</a:t>
+            </a:r>
+          </a:p>
+          <a:p>
+            <a:pPr>
+              <a:spcAft>
+                <a:spcPts val="600"/>
+              </a:spcAft>
+            </a:pPr>
+            <a:r>
+              <a:rPr sz="1500">
+                <a:solidFill>
+                  <a:srgbClr val="22282E"/>
+                </a:solidFill>
+              </a:rPr>
+              <a:t>•  En NTFS, extrae y parsea la MFT con MFTECmd:</a:t>
             </a:r>
           </a:p>
         </p:txBody>
@@ -3526,7 +3516,7 @@
                   <a:srgbClr val="0B3D2E"/>
                 </a:solidFill>
               </a:rPr>
-              <a:t>🔗 Referencias</a:t>
+              <a:t>✍️ Ejercicios</a:t>
             </a:r>
           </a:p>
         </p:txBody>
@@ -3564,56 +3554,757 @@
                   <a:srgbClr val="22282E"/>
                 </a:solidFill>
               </a:rPr>
-              <a:t>•  Carrier, B. — File System Forensic Analysis, Addison-Wesley 2005.</a:t>
-            </a:r>
-          </a:p>
-          <a:p>
-            <a:pPr>
-              <a:spcAft>
-                <a:spcPts val="600"/>
-              </a:spcAft>
-            </a:pPr>
-            <a:r>
-              <a:rPr sz="1500">
-                <a:solidFill>
-                  <a:srgbClr val="22282E"/>
-                </a:solidFill>
-              </a:rPr>
-              <a:t>•  The Sleuth Kit: &lt;https://www.sleuthkit.org/&gt;</a:t>
-            </a:r>
-          </a:p>
-          <a:p>
-            <a:pPr>
-              <a:spcAft>
-                <a:spcPts val="600"/>
-              </a:spcAft>
-            </a:pPr>
-            <a:r>
-              <a:rPr sz="1500">
-                <a:solidFill>
-                  <a:srgbClr val="22282E"/>
-                </a:solidFill>
-              </a:rPr>
-              <a:t>•  Eric Zimmerman's Tools (MFTECmd): &lt;https://ericzimmerman.github.io/&gt;</a:t>
-            </a:r>
-          </a:p>
-          <a:p>
-            <a:pPr>
-              <a:spcAft>
-                <a:spcPts val="600"/>
-              </a:spcAft>
-            </a:pPr>
-            <a:r>
-              <a:rPr sz="1500">
-                <a:solidFill>
-                  <a:srgbClr val="22282E"/>
-                </a:solidFill>
-              </a:rPr>
-              <a:t>•  Microsoft — NTFS documentation: &lt;https://learn.microsoft.com/windows-server/storage/file-server/ntfs-overview&gt;</a:t>
-            </a:r>
-          </a:p>
-        </p:txBody>
-      </p:sp>
+              <a:t>•  Explica la diferencia entre timestamps residentes y no residentes en la MFT.</a:t>
+            </a:r>
+          </a:p>
+          <a:p>
+            <a:pPr>
+              <a:spcAft>
+                <a:spcPts val="600"/>
+              </a:spcAft>
+            </a:pPr>
+            <a:r>
+              <a:rPr sz="1500">
+                <a:solidFill>
+                  <a:srgbClr val="22282E"/>
+                </a:solidFill>
+              </a:rPr>
+              <a:t>•  Detecta timestomping comparando $SI y $FN en una MFT de ejemplo.</a:t>
+            </a:r>
+          </a:p>
+          <a:p>
+            <a:pPr>
+              <a:spcAft>
+                <a:spcPts val="600"/>
+              </a:spcAft>
+            </a:pPr>
+            <a:r>
+              <a:rPr sz="1500">
+                <a:solidFill>
+                  <a:srgbClr val="22282E"/>
+                </a:solidFill>
+              </a:rPr>
+              <a:t>•  Recupera un archivo borrado propio con icat y verifica su contenido.</a:t>
+            </a:r>
+          </a:p>
+          <a:p>
+            <a:pPr>
+              <a:spcAft>
+                <a:spcPts val="600"/>
+              </a:spcAft>
+            </a:pPr>
+            <a:r>
+              <a:rPr sz="1500">
+                <a:solidFill>
+                  <a:srgbClr val="22282E"/>
+                </a:solidFill>
+              </a:rPr>
+              <a:t>•  Interpreta el significado de cada letra en MACB con un ejemplo.</a:t>
+            </a:r>
+          </a:p>
+          <a:p>
+            <a:pPr>
+              <a:spcAft>
+                <a:spcPts val="600"/>
+              </a:spcAft>
+            </a:pPr>
+            <a:r>
+              <a:rPr sz="1500">
+                <a:solidFill>
+                  <a:srgbClr val="22282E"/>
+                </a:solidFill>
+              </a:rPr>
+              <a:t>•  Usa debugfs para listar los inodos borrados de una imagen ext4.</a:t>
+            </a:r>
+          </a:p>
+          <a:p>
+            <a:pPr>
+              <a:spcAft>
+                <a:spcPts val="600"/>
+              </a:spcAft>
+            </a:pPr>
+            <a:r>
+              <a:rPr sz="1500">
+                <a:solidFill>
+                  <a:srgbClr val="22282E"/>
+                </a:solidFill>
+              </a:rPr>
+              <a:t>•  Compara cómo NTFS y ext4 manejan el borrado de un archivo.</a:t>
+            </a:r>
+          </a:p>
+        </p:txBody>
+      </p:sp>
+    </p:spTree>
+  </p:cSld>
+  <p:clrMapOvr>
+    <a:masterClrMapping/>
+  </p:clrMapOvr>
+</p:sld>
+</file>
+
+<file path=ppt/slides/slide13.xml><?xml version="1.0" encoding="utf-8"?>
+<p:sld xmlns:a="http://schemas.openxmlformats.org/drawingml/2006/main" xmlns:p="http://schemas.openxmlformats.org/presentationml/2006/main" xmlns:r="http://schemas.openxmlformats.org/officeDocument/2006/relationships">
+  <p:cSld>
+    <p:spTree>
+      <p:nvGrpSpPr>
+        <p:cNvPr id="1" name=""/>
+        <p:cNvGrpSpPr/>
+        <p:nvPr/>
+      </p:nvGrpSpPr>
+      <p:grpSpPr/>
+      <p:sp>
+        <p:nvSpPr>
+          <p:cNvPr id="2" name="TextBox 1"/>
+          <p:cNvSpPr txBox="1"/>
+          <p:nvPr/>
+        </p:nvSpPr>
+        <p:spPr>
+          <a:xfrm>
+            <a:off x="457200" y="320040"/>
+            <a:ext cx="8229600" cy="822960"/>
+          </a:xfrm>
+          <a:prstGeom prst="rect">
+            <a:avLst/>
+          </a:prstGeom>
+          <a:noFill/>
+        </p:spPr>
+        <p:txBody>
+          <a:bodyPr wrap="square">
+            <a:spAutoFit/>
+          </a:bodyPr>
+          <a:lstStyle/>
+          <a:p>
+            <a:r>
+              <a:rPr sz="2600" b="1">
+                <a:solidFill>
+                  <a:srgbClr val="0B3D2E"/>
+                </a:solidFill>
+              </a:rPr>
+              <a:t>📝 Reto verificable</a:t>
+            </a:r>
+          </a:p>
+        </p:txBody>
+      </p:sp>
+      <p:sp>
+        <p:nvSpPr>
+          <p:cNvPr id="3" name="TextBox 2"/>
+          <p:cNvSpPr txBox="1"/>
+          <p:nvPr/>
+        </p:nvSpPr>
+        <p:spPr>
+          <a:xfrm>
+            <a:off x="457200" y="1280160"/>
+            <a:ext cx="8229600" cy="4937760"/>
+          </a:xfrm>
+          <a:prstGeom prst="rect">
+            <a:avLst/>
+          </a:prstGeom>
+          <a:noFill/>
+        </p:spPr>
+        <p:txBody>
+          <a:bodyPr wrap="square">
+            <a:spAutoFit/>
+          </a:bodyPr>
+          <a:lstStyle/>
+          <a:p>
+            <a:pPr>
+              <a:spcAft>
+                <a:spcPts val="600"/>
+              </a:spcAft>
+            </a:pPr>
+            <a:r>
+              <a:rPr sz="1500">
+                <a:solidFill>
+                  <a:srgbClr val="22282E"/>
+                </a:solidFill>
+              </a:rPr>
+              <a:t>•  A partir de una imagen NTFS propia donde borraste un archivo y alteraste deliberadamente sus tiempos, identifica las incoherencias en MFT y fuentes relacionadas, explica qué sostiene la manipulación…</a:t>
+            </a:r>
+          </a:p>
+          <a:p>
+            <a:pPr>
+              <a:spcAft>
+                <a:spcPts val="600"/>
+              </a:spcAft>
+            </a:pPr>
+            <a:r>
+              <a:rPr sz="1500">
+                <a:solidFill>
+                  <a:srgbClr val="22282E"/>
+                </a:solidFill>
+              </a:rPr>
+              <a:t>•  Criterio de aceptación: presentas (a) el archivo recuperado con icat, (b) una comparación $SI vs $FN que muestra la incoherencia de timestamps, y (c) una explicación de por qué esa incoherencia…</a:t>
+            </a:r>
+          </a:p>
+        </p:txBody>
+      </p:sp>
+    </p:spTree>
+  </p:cSld>
+  <p:clrMapOvr>
+    <a:masterClrMapping/>
+  </p:clrMapOvr>
+</p:sld>
+</file>
+
+<file path=ppt/slides/slide14.xml><?xml version="1.0" encoding="utf-8"?>
+<p:sld xmlns:a="http://schemas.openxmlformats.org/drawingml/2006/main" xmlns:p="http://schemas.openxmlformats.org/presentationml/2006/main" xmlns:r="http://schemas.openxmlformats.org/officeDocument/2006/relationships">
+  <p:cSld>
+    <p:spTree>
+      <p:nvGrpSpPr>
+        <p:cNvPr id="1" name=""/>
+        <p:cNvGrpSpPr/>
+        <p:nvPr/>
+      </p:nvGrpSpPr>
+      <p:grpSpPr/>
+      <p:sp>
+        <p:nvSpPr>
+          <p:cNvPr id="2" name="TextBox 1"/>
+          <p:cNvSpPr txBox="1"/>
+          <p:nvPr/>
+        </p:nvSpPr>
+        <p:spPr>
+          <a:xfrm>
+            <a:off x="457200" y="320040"/>
+            <a:ext cx="8229600" cy="822960"/>
+          </a:xfrm>
+          <a:prstGeom prst="rect">
+            <a:avLst/>
+          </a:prstGeom>
+          <a:noFill/>
+        </p:spPr>
+        <p:txBody>
+          <a:bodyPr wrap="square">
+            <a:spAutoFit/>
+          </a:bodyPr>
+          <a:lstStyle/>
+          <a:p>
+            <a:r>
+              <a:rPr sz="2600" b="1">
+                <a:solidFill>
+                  <a:srgbClr val="0B3D2E"/>
+                </a:solidFill>
+              </a:rPr>
+              <a:t>⚠️ Errores comunes</a:t>
+            </a:r>
+          </a:p>
+        </p:txBody>
+      </p:sp>
+      <p:sp>
+        <p:nvSpPr>
+          <p:cNvPr id="3" name="TextBox 2"/>
+          <p:cNvSpPr txBox="1"/>
+          <p:nvPr/>
+        </p:nvSpPr>
+        <p:spPr>
+          <a:xfrm>
+            <a:off x="457200" y="1280160"/>
+            <a:ext cx="8229600" cy="4937760"/>
+          </a:xfrm>
+          <a:prstGeom prst="rect">
+            <a:avLst/>
+          </a:prstGeom>
+          <a:noFill/>
+        </p:spPr>
+        <p:txBody>
+          <a:bodyPr wrap="square">
+            <a:spAutoFit/>
+          </a:bodyPr>
+          <a:lstStyle/>
+          <a:p>
+            <a:pPr>
+              <a:spcAft>
+                <a:spcPts val="600"/>
+              </a:spcAft>
+            </a:pPr>
+            <a:r>
+              <a:rPr sz="1500">
+                <a:solidFill>
+                  <a:srgbClr val="22282E"/>
+                </a:solidFill>
+              </a:rPr>
+              <a:t>•  fls no muestra offset correcto — Falta -o con el sector de inicio de la partición. Sácalo de mmls.</a:t>
+            </a:r>
+          </a:p>
+          <a:p>
+            <a:pPr>
+              <a:spcAft>
+                <a:spcPts val="600"/>
+              </a:spcAft>
+            </a:pPr>
+            <a:r>
+              <a:rPr sz="1500">
+                <a:solidFill>
+                  <a:srgbClr val="22282E"/>
+                </a:solidFill>
+              </a:rPr>
+              <a:t>•  icat devuelve datos basura — El inodo fue reasignado; los bloques ya se sobrescribieron.</a:t>
+            </a:r>
+          </a:p>
+          <a:p>
+            <a:pPr>
+              <a:spcAft>
+                <a:spcPts val="600"/>
+              </a:spcAft>
+            </a:pPr>
+            <a:r>
+              <a:rPr sz="1500">
+                <a:solidFill>
+                  <a:srgbClr val="22282E"/>
+                </a:solidFill>
+              </a:rPr>
+              <a:t>•  Timestamps "imposibles" (futuro) — Timestomping o reloj alterado. Contrasta con $FN.</a:t>
+            </a:r>
+          </a:p>
+          <a:p>
+            <a:pPr>
+              <a:spcAft>
+                <a:spcPts val="600"/>
+              </a:spcAft>
+            </a:pPr>
+            <a:r>
+              <a:rPr sz="1500">
+                <a:solidFill>
+                  <a:srgbClr val="22282E"/>
+                </a:solidFill>
+              </a:rPr>
+              <a:t>•  extundelete no recupera nada — ext4 limpió los punteros del inodo. Prueba carving (clase 214).</a:t>
+            </a:r>
+          </a:p>
+          <a:p>
+            <a:pPr>
+              <a:spcAft>
+                <a:spcPts val="600"/>
+              </a:spcAft>
+            </a:pPr>
+            <a:r>
+              <a:rPr sz="1500">
+                <a:solidFill>
+                  <a:srgbClr val="22282E"/>
+                </a:solidFill>
+              </a:rPr>
+              <a:t>•  MFTECmd no encuentra $MFT — Debes extraer $MFT con FTK Imager primero.</a:t>
+            </a:r>
+          </a:p>
+        </p:txBody>
+      </p:sp>
+    </p:spTree>
+  </p:cSld>
+  <p:clrMapOvr>
+    <a:masterClrMapping/>
+  </p:clrMapOvr>
+</p:sld>
+</file>
+
+<file path=ppt/slides/slide15.xml><?xml version="1.0" encoding="utf-8"?>
+<p:sld xmlns:a="http://schemas.openxmlformats.org/drawingml/2006/main" xmlns:p="http://schemas.openxmlformats.org/presentationml/2006/main" xmlns:r="http://schemas.openxmlformats.org/officeDocument/2006/relationships">
+  <p:cSld>
+    <p:spTree>
+      <p:nvGrpSpPr>
+        <p:cNvPr id="1" name=""/>
+        <p:cNvGrpSpPr/>
+        <p:nvPr/>
+      </p:nvGrpSpPr>
+      <p:grpSpPr/>
+      <p:sp>
+        <p:nvSpPr>
+          <p:cNvPr id="2" name="TextBox 1"/>
+          <p:cNvSpPr txBox="1"/>
+          <p:nvPr/>
+        </p:nvSpPr>
+        <p:spPr>
+          <a:xfrm>
+            <a:off x="457200" y="320040"/>
+            <a:ext cx="8229600" cy="822960"/>
+          </a:xfrm>
+          <a:prstGeom prst="rect">
+            <a:avLst/>
+          </a:prstGeom>
+          <a:noFill/>
+        </p:spPr>
+        <p:txBody>
+          <a:bodyPr wrap="square">
+            <a:spAutoFit/>
+          </a:bodyPr>
+          <a:lstStyle/>
+          <a:p>
+            <a:r>
+              <a:rPr sz="2600" b="1">
+                <a:solidFill>
+                  <a:srgbClr val="0B3D2E"/>
+                </a:solidFill>
+              </a:rPr>
+              <a:t>❓ Preguntas frecuentes</a:t>
+            </a:r>
+          </a:p>
+        </p:txBody>
+      </p:sp>
+      <p:sp>
+        <p:nvSpPr>
+          <p:cNvPr id="3" name="TextBox 2"/>
+          <p:cNvSpPr txBox="1"/>
+          <p:nvPr/>
+        </p:nvSpPr>
+        <p:spPr>
+          <a:xfrm>
+            <a:off x="457200" y="1280160"/>
+            <a:ext cx="8229600" cy="4937760"/>
+          </a:xfrm>
+          <a:prstGeom prst="rect">
+            <a:avLst/>
+          </a:prstGeom>
+          <a:noFill/>
+        </p:spPr>
+        <p:txBody>
+          <a:bodyPr wrap="square">
+            <a:spAutoFit/>
+          </a:bodyPr>
+          <a:lstStyle/>
+          <a:p>
+            <a:pPr>
+              <a:spcAft>
+                <a:spcPts val="600"/>
+              </a:spcAft>
+            </a:pPr>
+            <a:r>
+              <a:rPr sz="1500">
+                <a:solidFill>
+                  <a:srgbClr val="22282E"/>
+                </a:solidFill>
+              </a:rPr>
+              <a:t>•  ❓ ¿Por qué hay dos juegos de timestamps en NTFS?</a:t>
+            </a:r>
+          </a:p>
+          <a:p>
+            <a:pPr>
+              <a:spcAft>
+                <a:spcPts val="600"/>
+              </a:spcAft>
+            </a:pPr>
+            <a:r>
+              <a:rPr sz="1500">
+                <a:solidFill>
+                  <a:srgbClr val="22282E"/>
+                </a:solidFill>
+              </a:rPr>
+              <a:t>•  Ambos atributos los mantiene NTFS bajo reglas y operaciones distintas; $FILENAME no debe tratarse como reloj inmune. Compararlos puede revelar una incoherencia que se explica con operaciones, journal…</a:t>
+            </a:r>
+          </a:p>
+          <a:p>
+            <a:pPr>
+              <a:spcAft>
+                <a:spcPts val="600"/>
+              </a:spcAft>
+            </a:pPr>
+            <a:r>
+              <a:rPr sz="1500">
+                <a:solidFill>
+                  <a:srgbClr val="22282E"/>
+                </a:solidFill>
+              </a:rPr>
+              <a:t>•  ❓ ¿ext4 conserva archivos borrados?</a:t>
+            </a:r>
+          </a:p>
+          <a:p>
+            <a:pPr>
+              <a:spcAft>
+                <a:spcPts val="600"/>
+              </a:spcAft>
+            </a:pPr>
+            <a:r>
+              <a:rPr sz="1500">
+                <a:solidFill>
+                  <a:srgbClr val="22282E"/>
+                </a:solidFill>
+              </a:rPr>
+              <a:t>•  Con frecuencia quedan menos punteros útiles tras liberar el inodo. El journal puede aportar metadatos dentro de su ventana y el carving es una alternativa, aunque sobrescritura, TRIM, cifrado o…</a:t>
+            </a:r>
+          </a:p>
+          <a:p>
+            <a:pPr>
+              <a:spcAft>
+                <a:spcPts val="600"/>
+              </a:spcAft>
+            </a:pPr>
+            <a:r>
+              <a:rPr sz="1500">
+                <a:solidFill>
+                  <a:srgbClr val="22282E"/>
+                </a:solidFill>
+              </a:rPr>
+              <a:t>•  ❓ ¿Qué es un archivo residente?</a:t>
+            </a:r>
+          </a:p>
+          <a:p>
+            <a:pPr>
+              <a:spcAft>
+                <a:spcPts val="600"/>
+              </a:spcAft>
+            </a:pPr>
+            <a:r>
+              <a:rPr sz="1500">
+                <a:solidFill>
+                  <a:srgbClr val="22282E"/>
+                </a:solidFill>
+              </a:rPr>
+              <a:t>•  Uno tan pequeño que sus datos caben dentro del propio registro de la MFT, sin ocupar clusters aparte.</a:t>
+            </a:r>
+          </a:p>
+          <a:p>
+            <a:pPr>
+              <a:spcAft>
+                <a:spcPts val="600"/>
+              </a:spcAft>
+            </a:pPr>
+            <a:r>
+              <a:rPr sz="1500">
+                <a:solidFill>
+                  <a:srgbClr val="22282E"/>
+                </a:solidFill>
+              </a:rPr>
+              <a:t>•  ❓ ¿El $UsnJrnl está siempre activo?</a:t>
+            </a:r>
+          </a:p>
+        </p:txBody>
+      </p:sp>
+    </p:spTree>
+  </p:cSld>
+  <p:clrMapOvr>
+    <a:masterClrMapping/>
+  </p:clrMapOvr>
+</p:sld>
+</file>
+
+<file path=ppt/slides/slide16.xml><?xml version="1.0" encoding="utf-8"?>
+<p:sld xmlns:a="http://schemas.openxmlformats.org/drawingml/2006/main" xmlns:p="http://schemas.openxmlformats.org/presentationml/2006/main" xmlns:r="http://schemas.openxmlformats.org/officeDocument/2006/relationships">
+  <p:cSld>
+    <p:spTree>
+      <p:nvGrpSpPr>
+        <p:cNvPr id="1" name=""/>
+        <p:cNvGrpSpPr/>
+        <p:nvPr/>
+      </p:nvGrpSpPr>
+      <p:grpSpPr/>
+      <p:sp>
+        <p:nvSpPr>
+          <p:cNvPr id="2" name="TextBox 1"/>
+          <p:cNvSpPr txBox="1"/>
+          <p:nvPr/>
+        </p:nvSpPr>
+        <p:spPr>
+          <a:xfrm>
+            <a:off x="457200" y="320040"/>
+            <a:ext cx="8229600" cy="822960"/>
+          </a:xfrm>
+          <a:prstGeom prst="rect">
+            <a:avLst/>
+          </a:prstGeom>
+          <a:noFill/>
+        </p:spPr>
+        <p:txBody>
+          <a:bodyPr wrap="square">
+            <a:spAutoFit/>
+          </a:bodyPr>
+          <a:lstStyle/>
+          <a:p>
+            <a:r>
+              <a:rPr sz="2600" b="1">
+                <a:solidFill>
+                  <a:srgbClr val="0B3D2E"/>
+                </a:solidFill>
+              </a:rPr>
+              <a:t>🔗 Referencias verificables y alcance</a:t>
+            </a:r>
+          </a:p>
+        </p:txBody>
+      </p:sp>
+      <p:sp>
+        <p:nvSpPr>
+          <p:cNvPr id="3" name="TextBox 2"/>
+          <p:cNvSpPr txBox="1"/>
+          <p:nvPr/>
+        </p:nvSpPr>
+        <p:spPr>
+          <a:xfrm>
+            <a:off x="457200" y="1280160"/>
+            <a:ext cx="8229600" cy="4937760"/>
+          </a:xfrm>
+          <a:prstGeom prst="rect">
+            <a:avLst/>
+          </a:prstGeom>
+          <a:noFill/>
+        </p:spPr>
+        <p:txBody>
+          <a:bodyPr wrap="square">
+            <a:spAutoFit/>
+          </a:bodyPr>
+          <a:lstStyle/>
+          <a:p>
+            <a:pPr>
+              <a:spcAft>
+                <a:spcPts val="600"/>
+              </a:spcAft>
+            </a:pPr>
+            <a:r>
+              <a:rPr sz="1500">
+                <a:solidFill>
+                  <a:srgbClr val="22282E"/>
+                </a:solidFill>
+              </a:rPr>
+              <a:t>•  Microsoft, NTFS overview: documentación oficial de características NTFS; no interpreta por sí sola artefactos de un caso —…</a:t>
+            </a:r>
+          </a:p>
+          <a:p>
+            <a:pPr>
+              <a:spcAft>
+                <a:spcPts val="600"/>
+              </a:spcAft>
+            </a:pPr>
+            <a:r>
+              <a:rPr sz="1500">
+                <a:solidFill>
+                  <a:srgbClr val="22282E"/>
+                </a:solidFill>
+              </a:rPr>
+              <a:t>•  Linux Kernel, estructuras ext4: fuente primaria para inodos, extents, directorios y journal JBD2 — &lt;https://www.kernel.org/doc/html/latest/filesystems/ext4/index.html&gt;</a:t>
+            </a:r>
+          </a:p>
+          <a:p>
+            <a:pPr>
+              <a:spcAft>
+                <a:spcPts val="600"/>
+              </a:spcAft>
+            </a:pPr>
+            <a:r>
+              <a:rPr sz="1500">
+                <a:solidFill>
+                  <a:srgbClr val="22282E"/>
+                </a:solidFill>
+              </a:rPr>
+              <a:t>•  Linux Kernel, journal ext4: explica que JBD2 protege consistencia y que el modo habitual registra principalmente metadatos — &lt;https://www.kernel.org/doc/html/latest/filesystems/ext4/journal.html&gt;</a:t>
+            </a:r>
+          </a:p>
+          <a:p>
+            <a:pPr>
+              <a:spcAft>
+                <a:spcPts val="600"/>
+              </a:spcAft>
+            </a:pPr>
+            <a:r>
+              <a:rPr sz="1500">
+                <a:solidFill>
+                  <a:srgbClr val="22282E"/>
+                </a:solidFill>
+              </a:rPr>
+              <a:t>•  The Sleuth Kit: documentación primaria de herramientas y técnicas de análisis de filesystem — &lt;https://www.sleuthkit.org/sleuthkit/docs.php&gt;</a:t>
+            </a:r>
+          </a:p>
+          <a:p>
+            <a:pPr>
+              <a:spcAft>
+                <a:spcPts val="600"/>
+              </a:spcAft>
+            </a:pPr>
+            <a:r>
+              <a:rPr sz="1500">
+                <a:solidFill>
+                  <a:srgbClr val="22282E"/>
+                </a:solidFill>
+              </a:rPr>
+              <a:t>•  MFTECmd: documentación del proyecto para interpretar MFT; sus campos deben contrastarse con versión del parser y fuente original — &lt;https://github.com/EricZimmerman/MFTECmd&gt;</a:t>
+            </a:r>
+          </a:p>
+          <a:p>
+            <a:pPr>
+              <a:spcAft>
+                <a:spcPts val="600"/>
+              </a:spcAft>
+            </a:pPr>
+            <a:r>
+              <a:rPr sz="1500">
+                <a:solidFill>
+                  <a:srgbClr val="22282E"/>
+                </a:solidFill>
+              </a:rPr>
+              <a:t>•  Carrier, B. File System Forensic Analysis. Addison-Wesley: bibliografía complementaria.</a:t>
+            </a:r>
+          </a:p>
+        </p:txBody>
+      </p:sp>
+    </p:spTree>
+  </p:cSld>
+  <p:clrMapOvr>
+    <a:masterClrMapping/>
+  </p:clrMapOvr>
+</p:sld>
+</file>
+
+<file path=ppt/slides/slide17.xml><?xml version="1.0" encoding="utf-8"?>
+<p:sld xmlns:a="http://schemas.openxmlformats.org/drawingml/2006/main" xmlns:p="http://schemas.openxmlformats.org/presentationml/2006/main" xmlns:r="http://schemas.openxmlformats.org/officeDocument/2006/relationships">
+  <p:cSld>
+    <p:spTree>
+      <p:nvGrpSpPr>
+        <p:cNvPr id="1" name=""/>
+        <p:cNvGrpSpPr/>
+        <p:nvPr/>
+      </p:nvGrpSpPr>
+      <p:grpSpPr/>
+      <p:sp>
+        <p:nvSpPr>
+          <p:cNvPr id="2" name="TextBox 1"/>
+          <p:cNvSpPr txBox="1"/>
+          <p:nvPr/>
+        </p:nvSpPr>
+        <p:spPr>
+          <a:xfrm>
+            <a:off x="457200" y="274320"/>
+            <a:ext cx="8229600" cy="640080"/>
+          </a:xfrm>
+          <a:prstGeom prst="rect">
+            <a:avLst/>
+          </a:prstGeom>
+          <a:noFill/>
+        </p:spPr>
+        <p:txBody>
+          <a:bodyPr wrap="square">
+            <a:spAutoFit/>
+          </a:bodyPr>
+          <a:lstStyle/>
+          <a:p>
+            <a:r>
+              <a:rPr sz="2200" b="1">
+                <a:solidFill>
+                  <a:srgbClr val="0B3D2E"/>
+                </a:solidFill>
+              </a:rPr>
+              <a:t>Diagrama de la clase</a:t>
+            </a:r>
+          </a:p>
+        </p:txBody>
+      </p:sp>
+      <p:pic>
+        <p:nvPicPr>
+          <p:cNvPr id="3" name="Picture 2" descr="f2f35f9fd1a8b094.png"/>
+          <p:cNvPicPr>
+            <a:picLocks noChangeAspect="1"/>
+          </p:cNvPicPr>
+          <p:nvPr/>
+        </p:nvPicPr>
+        <p:blipFill>
+          <a:blip r:embed="rId2"/>
+          <a:stretch>
+            <a:fillRect/>
+          </a:stretch>
+        </p:blipFill>
+        <p:spPr>
+          <a:xfrm>
+            <a:off x="457200" y="2724912"/>
+            <a:ext cx="8229600" cy="2048256"/>
+          </a:xfrm>
+          <a:prstGeom prst="rect">
+            <a:avLst/>
+          </a:prstGeom>
+        </p:spPr>
+      </p:pic>
     </p:spTree>
   </p:cSld>
   <p:clrMapOvr>
@@ -3698,7 +4389,7 @@
                   <a:srgbClr val="22282E"/>
                 </a:solidFill>
               </a:rPr>
-              <a:t>•  Entender la anatomía interna de NTFS y ext4 al nivel que permite hacer forense real: la MFT y sus atributos, marcas de tiempo, el $LogFile y $UsnJrnl en NTFS; inodos, journal y timestamps en ext4. Al terminar podrás reconstruir la historia de un archivo aunque haya sido borrado o manipulado.</a:t>
+              <a:t>•  Entender la anatomía interna de NTFS y ext4 al nivel que permite hacer forense real: la MFT y sus atributos, marcas de tiempo, el $LogFile y $UsnJrnl en NTFS; inodos, journal y timestamps en ext4. Al…</a:t>
             </a:r>
           </a:p>
         </p:txBody>
@@ -4092,7 +4783,7 @@
                   <a:srgbClr val="0B3D2E"/>
                 </a:solidFill>
               </a:rPr>
-              <a:t>📖 Definiciones y características</a:t>
+              <a:t>🧠 Explicación en profundidad</a:t>
             </a:r>
           </a:p>
         </p:txBody>
@@ -4130,97 +4821,97 @@
                   <a:srgbClr val="22282E"/>
                 </a:solidFill>
               </a:rPr>
-              <a:t>•  MFT (Master File Table): base de datos de NTFS donde cada archivo tiene un registro. Característica: incluso los archivos pequeños viven dentro de la MFT (residentes).</a:t>
-            </a:r>
-          </a:p>
-          <a:p>
-            <a:pPr>
-              <a:spcAft>
-                <a:spcPts val="600"/>
-              </a:spcAft>
-            </a:pPr>
-            <a:r>
-              <a:rPr sz="1500">
-                <a:solidFill>
-                  <a:srgbClr val="22282E"/>
-                </a:solidFill>
-              </a:rPr>
-              <a:t>•  $STANDARDINFORMATION: atributo con timestamps que el usuario puede modificar fácilmente. Característica: manipulable por timestomping.</a:t>
-            </a:r>
-          </a:p>
-          <a:p>
-            <a:pPr>
-              <a:spcAft>
-                <a:spcPts val="600"/>
-              </a:spcAft>
-            </a:pPr>
-            <a:r>
-              <a:rPr sz="1500">
-                <a:solidFill>
-                  <a:srgbClr val="22282E"/>
-                </a:solidFill>
-              </a:rPr>
-              <a:t>•  $FILENAME: atributo con timestamps que solo el kernel actualiza. Característica: útil para detectar manipulación de tiempos.</a:t>
-            </a:r>
-          </a:p>
-          <a:p>
-            <a:pPr>
-              <a:spcAft>
-                <a:spcPts val="600"/>
-              </a:spcAft>
-            </a:pPr>
-            <a:r>
-              <a:rPr sz="1500">
-                <a:solidFill>
-                  <a:srgbClr val="22282E"/>
-                </a:solidFill>
-              </a:rPr>
-              <a:t>•  MACB: Modified, Accessed, Changed/Created, Born. Característica: cuatro marcas que permiten ordenar eventos.</a:t>
-            </a:r>
-          </a:p>
-          <a:p>
-            <a:pPr>
-              <a:spcAft>
-                <a:spcPts val="600"/>
-              </a:spcAft>
-            </a:pPr>
-            <a:r>
-              <a:rPr sz="1500">
-                <a:solidFill>
-                  <a:srgbClr val="22282E"/>
-                </a:solidFill>
-              </a:rPr>
-              <a:t>•  $UsnJrnl: Update Sequence Number Journal, registra cambios en archivos. Característica: revela creaciones/borrados recientes.</a:t>
-            </a:r>
-          </a:p>
-          <a:p>
-            <a:pPr>
-              <a:spcAft>
-                <a:spcPts val="600"/>
-              </a:spcAft>
-            </a:pPr>
-            <a:r>
-              <a:rPr sz="1500">
-                <a:solidFill>
-                  <a:srgbClr val="22282E"/>
-                </a:solidFill>
-              </a:rPr>
-              <a:t>•  Inodo (ext4): estructura con metadatos y punteros a bloques de datos. Característica: al borrar, ext4 suele limpiar punteros (dificulta recuperar).</a:t>
-            </a:r>
-          </a:p>
-          <a:p>
-            <a:pPr>
-              <a:spcAft>
-                <a:spcPts val="600"/>
-              </a:spcAft>
-            </a:pPr>
-            <a:r>
-              <a:rPr sz="1500">
-                <a:solidFill>
-                  <a:srgbClr val="22282E"/>
-                </a:solidFill>
-              </a:rPr>
-              <a:t>•  Journal (jbd2): registro de transacciones de ext4. Característica: puede conservar metadatos ya sobrescritos.</a:t>
+              <a:t>•  El sistema de archivos es una base de metadatos que relaciona nombres, identificadores, tiempos y bloques. «El archivo fue borrado» suele significar que la referencia fue liberada; contenido y…</a:t>
+            </a:r>
+          </a:p>
+          <a:p>
+            <a:pPr>
+              <a:spcAft>
+                <a:spcPts val="600"/>
+              </a:spcAft>
+            </a:pPr>
+            <a:r>
+              <a:rPr sz="1500">
+                <a:solidFill>
+                  <a:srgbClr val="22282E"/>
+                </a:solidFill>
+              </a:rPr>
+              <a:t>•  NTFS usa registros MFT y atributos; ext4 usa inodos, extents y journal. Los cuatro tiempos MACB dependen del sistema, operación y herramienta, y pueden modificarse legítima o maliciosamente. Se…</a:t>
+            </a:r>
+          </a:p>
+          <a:p>
+            <a:pPr>
+              <a:spcAft>
+                <a:spcPts val="600"/>
+              </a:spcAft>
+            </a:pPr>
+            <a:r>
+              <a:rPr sz="1500">
+                <a:solidFill>
+                  <a:srgbClr val="22282E"/>
+                </a:solidFill>
+              </a:rPr>
+              <a:t>•  NTFS representa cada archivo o directorio mediante registros en la Master File Table. Los atributos pueden contener nombres, datos, tiempos y referencias; archivos pequeños incluso pueden ser…</a:t>
+            </a:r>
+          </a:p>
+          <a:p>
+            <a:pPr>
+              <a:spcAft>
+                <a:spcPts val="600"/>
+              </a:spcAft>
+            </a:pPr>
+            <a:r>
+              <a:rPr sz="1500">
+                <a:solidFill>
+                  <a:srgbClr val="22282E"/>
+                </a:solidFill>
+              </a:rPr>
+              <a:t>•  El USN Journal registra cambios seleccionados mientras exista retención; $LogFile apoya recuperación transaccional. Ninguno es auditoría completa de usuario. Se correlacionan con Event Logs, Prefetch…</a:t>
+            </a:r>
+          </a:p>
+          <a:p>
+            <a:pPr>
+              <a:spcAft>
+                <a:spcPts val="600"/>
+              </a:spcAft>
+            </a:pPr>
+            <a:r>
+              <a:rPr sz="1500">
+                <a:solidFill>
+                  <a:srgbClr val="22282E"/>
+                </a:solidFill>
+              </a:rPr>
+              <a:t>•  En ext4 el nombre vive en la entrada de directorio y el inode conserva metadatos y referencias a datos mediante extents. Borrar puede liberar la entrada y bloques; la recuperación depende de…</a:t>
+            </a:r>
+          </a:p>
+          <a:p>
+            <a:pPr>
+              <a:spcAft>
+                <a:spcPts val="600"/>
+              </a:spcAft>
+            </a:pPr>
+            <a:r>
+              <a:rPr sz="1500">
+                <a:solidFill>
+                  <a:srgbClr val="22282E"/>
+                </a:solidFill>
+              </a:rPr>
+              <a:t>•  MACB es una convención de análisis: Modified, Accessed, Changed y Birth/Creation cuando el sistema lo ofrece. ctime en Unix representa cambio de metadatos, no creación. Acceso puede estar reducido…</a:t>
+            </a:r>
+          </a:p>
+          <a:p>
+            <a:pPr>
+              <a:spcAft>
+                <a:spcPts val="600"/>
+              </a:spcAft>
+            </a:pPr>
+            <a:r>
+              <a:rPr sz="1500">
+                <a:solidFill>
+                  <a:srgbClr val="22282E"/>
+                </a:solidFill>
+              </a:rPr>
+              <a:t>•  Cuando un archivo se elimina, pueden quedar tres tipos de evidencia: metadato que refiere al objeto, contenido recuperado por bloques y rastros en otros artefactos. Recuperar un PDF por carving no…</a:t>
             </a:r>
           </a:p>
         </p:txBody>
@@ -4271,7 +4962,7 @@
                   <a:srgbClr val="0B3D2E"/>
                 </a:solidFill>
               </a:rPr>
-              <a:t>🧰 Herramientas y preparación</a:t>
+              <a:t>📔 Glosario</a:t>
             </a:r>
           </a:p>
         </p:txBody>
@@ -4309,52 +5000,97 @@
                   <a:srgbClr val="22282E"/>
                 </a:solidFill>
               </a:rPr>
-              <a:t>•  The Sleuth Kit (TSK): fls, istat, icat, mmls, fsstat, mactime.</a:t>
-            </a:r>
-          </a:p>
-          <a:p>
-            <a:pPr>
-              <a:spcAft>
-                <a:spcPts val="600"/>
-              </a:spcAft>
-            </a:pPr>
-            <a:r>
-              <a:rPr sz="1500">
-                <a:solidFill>
-                  <a:srgbClr val="22282E"/>
-                </a:solidFill>
-              </a:rPr>
-              <a:t>•  NTFS específico: analyzeMFT.py, MFTECmd (Eric Zimmerman), UsnJrnl2Csv.</a:t>
-            </a:r>
-          </a:p>
-          <a:p>
-            <a:pPr>
-              <a:spcAft>
-                <a:spcPts val="600"/>
-              </a:spcAft>
-            </a:pPr>
-            <a:r>
-              <a:rPr sz="1500">
-                <a:solidFill>
-                  <a:srgbClr val="22282E"/>
-                </a:solidFill>
-              </a:rPr>
-              <a:t>•  ext4: debugfs, extundelete.</a:t>
-            </a:r>
-          </a:p>
-          <a:p>
-            <a:pPr>
-              <a:spcAft>
-                <a:spcPts val="600"/>
-              </a:spcAft>
-            </a:pPr>
-            <a:r>
-              <a:rPr sz="1500">
-                <a:solidFill>
-                  <a:srgbClr val="22282E"/>
-                </a:solidFill>
-              </a:rPr>
-              <a:t>•  Entorno: monta las imágenes en solo lectura. Trabaja sobre imágenes propias creadas en la clase anterior.</a:t>
+              <a:t>•  MFT: tabla maestra de archivos de NTFS.</a:t>
+            </a:r>
+          </a:p>
+          <a:p>
+            <a:pPr>
+              <a:spcAft>
+                <a:spcPts val="600"/>
+              </a:spcAft>
+            </a:pPr>
+            <a:r>
+              <a:rPr sz="1500">
+                <a:solidFill>
+                  <a:srgbClr val="22282E"/>
+                </a:solidFill>
+              </a:rPr>
+              <a:t>•  Inode: estructura de metadatos en ext4.</a:t>
+            </a:r>
+          </a:p>
+          <a:p>
+            <a:pPr>
+              <a:spcAft>
+                <a:spcPts val="600"/>
+              </a:spcAft>
+            </a:pPr>
+            <a:r>
+              <a:rPr sz="1500">
+                <a:solidFill>
+                  <a:srgbClr val="22282E"/>
+                </a:solidFill>
+              </a:rPr>
+              <a:t>•  Extent: rango contiguo de bloques.</a:t>
+            </a:r>
+          </a:p>
+          <a:p>
+            <a:pPr>
+              <a:spcAft>
+                <a:spcPts val="600"/>
+              </a:spcAft>
+            </a:pPr>
+            <a:r>
+              <a:rPr sz="1500">
+                <a:solidFill>
+                  <a:srgbClr val="22282E"/>
+                </a:solidFill>
+              </a:rPr>
+              <a:t>•  Journal: registro para consistencia del sistema de archivos.</a:t>
+            </a:r>
+          </a:p>
+          <a:p>
+            <a:pPr>
+              <a:spcAft>
+                <a:spcPts val="600"/>
+              </a:spcAft>
+            </a:pPr>
+            <a:r>
+              <a:rPr sz="1500">
+                <a:solidFill>
+                  <a:srgbClr val="22282E"/>
+                </a:solidFill>
+              </a:rPr>
+              <a:t>•  Unallocated: espacio no asignado a un objeto activo.</a:t>
+            </a:r>
+          </a:p>
+          <a:p>
+            <a:pPr>
+              <a:spcAft>
+                <a:spcPts val="600"/>
+              </a:spcAft>
+            </a:pPr>
+            <a:r>
+              <a:rPr sz="1500">
+                <a:solidFill>
+                  <a:srgbClr val="22282E"/>
+                </a:solidFill>
+              </a:rPr>
+              <a:t>•  Slack space: bytes no usados dentro de una unidad asignada.</a:t>
+            </a:r>
+          </a:p>
+          <a:p>
+            <a:pPr>
+              <a:spcAft>
+                <a:spcPts val="600"/>
+              </a:spcAft>
+            </a:pPr>
+            <a:r>
+              <a:rPr sz="1500">
+                <a:solidFill>
+                  <a:srgbClr val="22282E"/>
+                </a:solidFill>
+              </a:rPr>
+              <a:t>•  MACB: tiempos de modificación, acceso, cambio y nacimiento.</a:t>
             </a:r>
           </a:p>
         </p:txBody>
@@ -4405,7 +5141,7 @@
                   <a:srgbClr val="0B3D2E"/>
                 </a:solidFill>
               </a:rPr>
-              <a:t>🧪 Laboratorio guiado</a:t>
+              <a:t>📖 Definiciones y características</a:t>
             </a:r>
           </a:p>
         </p:txBody>
@@ -4443,97 +5179,97 @@
                   <a:srgbClr val="22282E"/>
                 </a:solidFill>
               </a:rPr>
-              <a:t>•  Examina la tabla de particiones:</a:t>
-            </a:r>
-          </a:p>
-          <a:p>
-            <a:pPr>
-              <a:spcAft>
-                <a:spcPts val="600"/>
-              </a:spcAft>
-            </a:pPr>
-            <a:r>
-              <a:rPr sz="1500">
-                <a:solidFill>
-                  <a:srgbClr val="22282E"/>
-                </a:solidFill>
-              </a:rPr>
-              <a:t>•  mmls caso001.dd</a:t>
-            </a:r>
-          </a:p>
-          <a:p>
-            <a:pPr>
-              <a:spcAft>
-                <a:spcPts val="600"/>
-              </a:spcAft>
-            </a:pPr>
-            <a:r>
-              <a:rPr sz="1500">
-                <a:solidFill>
-                  <a:srgbClr val="22282E"/>
-                </a:solidFill>
-              </a:rPr>
-              <a:t>•  Muestra estadísticas del sistema de archivos:</a:t>
-            </a:r>
-          </a:p>
-          <a:p>
-            <a:pPr>
-              <a:spcAft>
-                <a:spcPts val="600"/>
-              </a:spcAft>
-            </a:pPr>
-            <a:r>
-              <a:rPr sz="1500">
-                <a:solidFill>
-                  <a:srgbClr val="22282E"/>
-                </a:solidFill>
-              </a:rPr>
-              <a:t>•  fsstat -o 2048 caso001.dd</a:t>
-            </a:r>
-          </a:p>
-          <a:p>
-            <a:pPr>
-              <a:spcAft>
-                <a:spcPts val="600"/>
-              </a:spcAft>
-            </a:pPr>
-            <a:r>
-              <a:rPr sz="1500">
-                <a:solidFill>
-                  <a:srgbClr val="22282E"/>
-                </a:solidFill>
-              </a:rPr>
-              <a:t>•  Lista archivos incluyendo borrados (marcados con ):</a:t>
-            </a:r>
-          </a:p>
-          <a:p>
-            <a:pPr>
-              <a:spcAft>
-                <a:spcPts val="600"/>
-              </a:spcAft>
-            </a:pPr>
-            <a:r>
-              <a:rPr sz="1500">
-                <a:solidFill>
-                  <a:srgbClr val="22282E"/>
-                </a:solidFill>
-              </a:rPr>
-              <a:t>•  fls -r -o 2048 caso001.dd</a:t>
-            </a:r>
-          </a:p>
-          <a:p>
-            <a:pPr>
-              <a:spcAft>
-                <a:spcPts val="600"/>
-              </a:spcAft>
-            </a:pPr>
-            <a:r>
-              <a:rPr sz="1500">
-                <a:solidFill>
-                  <a:srgbClr val="22282E"/>
-                </a:solidFill>
-              </a:rPr>
-              <a:t>•  Inspecciona un inodo/registro MFT concreto:</a:t>
+              <a:t>•  MFT (Master File Table): base de datos de NTFS donde cada archivo tiene un registro. Característica: incluso los archivos pequeños viven dentro de la MFT (residentes).</a:t>
+            </a:r>
+          </a:p>
+          <a:p>
+            <a:pPr>
+              <a:spcAft>
+                <a:spcPts val="600"/>
+              </a:spcAft>
+            </a:pPr>
+            <a:r>
+              <a:rPr sz="1500">
+                <a:solidFill>
+                  <a:srgbClr val="22282E"/>
+                </a:solidFill>
+              </a:rPr>
+              <a:t>•  $STANDARDINFORMATION: atributo NTFS que incluye timestamps y otros metadatos. Característica: distintas operaciones y APIs pueden modificar sus tiempos; una discrepancia requiere corroboración.</a:t>
+            </a:r>
+          </a:p>
+          <a:p>
+            <a:pPr>
+              <a:spcAft>
+                <a:spcPts val="600"/>
+              </a:spcAft>
+            </a:pPr>
+            <a:r>
+              <a:rPr sz="1500">
+                <a:solidFill>
+                  <a:srgbClr val="22282E"/>
+                </a:solidFill>
+              </a:rPr>
+              <a:t>•  $FILENAME: atributo NTFS asociado a nombre y referencia de directorio que también contiene tiempos. Característica: compararlo con otras fuentes puede revelar inconsistencias, no probar por sí solo…</a:t>
+            </a:r>
+          </a:p>
+          <a:p>
+            <a:pPr>
+              <a:spcAft>
+                <a:spcPts val="600"/>
+              </a:spcAft>
+            </a:pPr>
+            <a:r>
+              <a:rPr sz="1500">
+                <a:solidFill>
+                  <a:srgbClr val="22282E"/>
+                </a:solidFill>
+              </a:rPr>
+              <a:t>•  MACB: Modified, Accessed, Changed (ctime: cambio de metadatos/entrada MFT), Born (creación). Característica: cuatro marcas que permiten ordenar eventos.</a:t>
+            </a:r>
+          </a:p>
+          <a:p>
+            <a:pPr>
+              <a:spcAft>
+                <a:spcPts val="600"/>
+              </a:spcAft>
+            </a:pPr>
+            <a:r>
+              <a:rPr sz="1500">
+                <a:solidFill>
+                  <a:srgbClr val="22282E"/>
+                </a:solidFill>
+              </a:rPr>
+              <a:t>•  $UsnJrnl: Update Sequence Number Journal, registra cambios en archivos. Característica: revela creaciones/borrados recientes.</a:t>
+            </a:r>
+          </a:p>
+          <a:p>
+            <a:pPr>
+              <a:spcAft>
+                <a:spcPts val="600"/>
+              </a:spcAft>
+            </a:pPr>
+            <a:r>
+              <a:rPr sz="1500">
+                <a:solidFill>
+                  <a:srgbClr val="22282E"/>
+                </a:solidFill>
+              </a:rPr>
+              <a:t>•  Inodo (ext4): estructura con metadatos y punteros a bloques de datos. Característica: al borrar, ext4 suele limpiar punteros (dificulta recuperar).</a:t>
+            </a:r>
+          </a:p>
+          <a:p>
+            <a:pPr>
+              <a:spcAft>
+                <a:spcPts val="600"/>
+              </a:spcAft>
+            </a:pPr>
+            <a:r>
+              <a:rPr sz="1500">
+                <a:solidFill>
+                  <a:srgbClr val="22282E"/>
+                </a:solidFill>
+              </a:rPr>
+              <a:t>•  Journal (jbd2): mecanismo transaccional usado por ext4 para consistencia. Característica: puede aportar rastros de metadatos dentro de su ventana, pero no es un registro de auditoría completo.</a:t>
             </a:r>
           </a:p>
         </p:txBody>
@@ -4584,7 +5320,7 @@
                   <a:srgbClr val="0B3D2E"/>
                 </a:solidFill>
               </a:rPr>
-              <a:t>✍️ Ejercicios</a:t>
+              <a:t>🔍 Caso razonado — script eliminado en dos sistemas</a:t>
             </a:r>
           </a:p>
         </p:txBody>
@@ -4622,82 +5358,22 @@
                   <a:srgbClr val="22282E"/>
                 </a:solidFill>
               </a:rPr>
-              <a:t>•  Explica la diferencia entre timestamps residentes y no residentes en la MFT.</a:t>
-            </a:r>
-          </a:p>
-          <a:p>
-            <a:pPr>
-              <a:spcAft>
-                <a:spcPts val="600"/>
-              </a:spcAft>
-            </a:pPr>
-            <a:r>
-              <a:rPr sz="1500">
-                <a:solidFill>
-                  <a:srgbClr val="22282E"/>
-                </a:solidFill>
-              </a:rPr>
-              <a:t>•  Detecta timestomping comparando $SI y $FN en una MFT de ejemplo.</a:t>
-            </a:r>
-          </a:p>
-          <a:p>
-            <a:pPr>
-              <a:spcAft>
-                <a:spcPts val="600"/>
-              </a:spcAft>
-            </a:pPr>
-            <a:r>
-              <a:rPr sz="1500">
-                <a:solidFill>
-                  <a:srgbClr val="22282E"/>
-                </a:solidFill>
-              </a:rPr>
-              <a:t>•  Recupera un archivo borrado propio con icat y verifica su contenido.</a:t>
-            </a:r>
-          </a:p>
-          <a:p>
-            <a:pPr>
-              <a:spcAft>
-                <a:spcPts val="600"/>
-              </a:spcAft>
-            </a:pPr>
-            <a:r>
-              <a:rPr sz="1500">
-                <a:solidFill>
-                  <a:srgbClr val="22282E"/>
-                </a:solidFill>
-              </a:rPr>
-              <a:t>•  Interpreta el significado de cada letra en MACB con un ejemplo.</a:t>
-            </a:r>
-          </a:p>
-          <a:p>
-            <a:pPr>
-              <a:spcAft>
-                <a:spcPts val="600"/>
-              </a:spcAft>
-            </a:pPr>
-            <a:r>
-              <a:rPr sz="1500">
-                <a:solidFill>
-                  <a:srgbClr val="22282E"/>
-                </a:solidFill>
-              </a:rPr>
-              <a:t>•  Usa debugfs para listar los inodos borrados de una imagen ext4.</a:t>
-            </a:r>
-          </a:p>
-          <a:p>
-            <a:pPr>
-              <a:spcAft>
-                <a:spcPts val="600"/>
-              </a:spcAft>
-            </a:pPr>
-            <a:r>
-              <a:rPr sz="1500">
-                <a:solidFill>
-                  <a:srgbClr val="22282E"/>
-                </a:solidFill>
-              </a:rPr>
-              <a:t>•  Compara cómo NTFS y ext4 manejan el borrado de un archivo.</a:t>
+              <a:t>•  En NTFS, una entrada MFT liberada conserva nombre y atributos; el USN puede registrar una razón de cambio dentro de su ventana y Prefetch aporta una relación separada con ejecución. En ext4, el…</a:t>
+            </a:r>
+          </a:p>
+          <a:p>
+            <a:pPr>
+              <a:spcAft>
+                <a:spcPts val="600"/>
+              </a:spcAft>
+            </a:pPr>
+            <a:r>
+              <a:rPr sz="1500">
+                <a:solidFill>
+                  <a:srgbClr val="22282E"/>
+                </a:solidFill>
+              </a:rPr>
+              <a:t>•  El analista recupera bytes candidatos de ambos medios y registra offsets. En Windows puede relacionar contenido, MFT y USN; en Linux relaciona inode, directorio, journal y logs. Si el carving…</a:t>
             </a:r>
           </a:p>
         </p:txBody>
@@ -4748,7 +5424,7 @@
                   <a:srgbClr val="0B3D2E"/>
                 </a:solidFill>
               </a:rPr>
-              <a:t>📝 Reto verificable</a:t>
+              <a:t>✅ Criterio de dominio</a:t>
             </a:r>
           </a:p>
         </p:txBody>
@@ -4786,22 +5462,7 @@
                   <a:srgbClr val="22282E"/>
                 </a:solidFill>
               </a:rPr>
-              <a:t>•  A partir de una imagen NTFS propia donde borraste un archivo y le manipulaste los tiempos, demuestra con evidencia de la MFT que hubo timestomping y recupera el contenido original del archivo borrado.</a:t>
-            </a:r>
-          </a:p>
-          <a:p>
-            <a:pPr>
-              <a:spcAft>
-                <a:spcPts val="600"/>
-              </a:spcAft>
-            </a:pPr>
-            <a:r>
-              <a:rPr sz="1500">
-                <a:solidFill>
-                  <a:srgbClr val="22282E"/>
-                </a:solidFill>
-              </a:rPr>
-              <a:t>•  Criterio de aceptación: presentas (a) el archivo recuperado con icat, (b) una comparación $SI vs $FN que muestra la incoherencia de timestamps, y (c) una explicación de por qué esa incoherencia indica manipulación.</a:t>
+              <a:t>•  El alumno explica dónde viven nombre, metadatos y datos en NTFS y ext4; interpreta MACB sin llamar creación al ctime de Unix; y distingue journal de auditoría. Debe producir una timeline con fuente y…</a:t>
             </a:r>
           </a:p>
         </p:txBody>
